--- a/ゲーム科1年/00_前期/ゲームプログラミングⅡ/03_サウンド.pptx
+++ b/ゲーム科1年/00_前期/ゲームプログラミングⅡ/03_サウンド.pptx
@@ -269,7 +269,7 @@
           <a:p>
             <a:fld id="{E9CC885B-4903-4D54-9A93-00025F12DED9}" type="datetimeFigureOut">
               <a:rPr kumimoji="1" lang="ja-JP" altLang="en-US" smtClean="0"/>
-              <a:t>2024/9/30</a:t>
+              <a:t>2025/1/6</a:t>
             </a:fld>
             <a:endParaRPr kumimoji="1" lang="ja-JP" altLang="en-US"/>
           </a:p>
@@ -499,7 +499,7 @@
           <a:p>
             <a:fld id="{E9CC885B-4903-4D54-9A93-00025F12DED9}" type="datetimeFigureOut">
               <a:rPr kumimoji="1" lang="ja-JP" altLang="en-US" smtClean="0"/>
-              <a:t>2024/9/30</a:t>
+              <a:t>2025/1/6</a:t>
             </a:fld>
             <a:endParaRPr kumimoji="1" lang="ja-JP" altLang="en-US"/>
           </a:p>
@@ -739,7 +739,7 @@
           <a:p>
             <a:fld id="{E9CC885B-4903-4D54-9A93-00025F12DED9}" type="datetimeFigureOut">
               <a:rPr kumimoji="1" lang="ja-JP" altLang="en-US" smtClean="0"/>
-              <a:t>2024/9/30</a:t>
+              <a:t>2025/1/6</a:t>
             </a:fld>
             <a:endParaRPr kumimoji="1" lang="ja-JP" altLang="en-US"/>
           </a:p>
@@ -969,7 +969,7 @@
           <a:p>
             <a:fld id="{E9CC885B-4903-4D54-9A93-00025F12DED9}" type="datetimeFigureOut">
               <a:rPr kumimoji="1" lang="ja-JP" altLang="en-US" smtClean="0"/>
-              <a:t>2024/9/30</a:t>
+              <a:t>2025/1/6</a:t>
             </a:fld>
             <a:endParaRPr kumimoji="1" lang="ja-JP" altLang="en-US"/>
           </a:p>
@@ -1244,7 +1244,7 @@
           <a:p>
             <a:fld id="{E9CC885B-4903-4D54-9A93-00025F12DED9}" type="datetimeFigureOut">
               <a:rPr kumimoji="1" lang="ja-JP" altLang="en-US" smtClean="0"/>
-              <a:t>2024/9/30</a:t>
+              <a:t>2025/1/6</a:t>
             </a:fld>
             <a:endParaRPr kumimoji="1" lang="ja-JP" altLang="en-US"/>
           </a:p>
@@ -1573,7 +1573,7 @@
           <a:p>
             <a:fld id="{E9CC885B-4903-4D54-9A93-00025F12DED9}" type="datetimeFigureOut">
               <a:rPr kumimoji="1" lang="ja-JP" altLang="en-US" smtClean="0"/>
-              <a:t>2024/9/30</a:t>
+              <a:t>2025/1/6</a:t>
             </a:fld>
             <a:endParaRPr kumimoji="1" lang="ja-JP" altLang="en-US"/>
           </a:p>
@@ -2049,7 +2049,7 @@
           <a:p>
             <a:fld id="{E9CC885B-4903-4D54-9A93-00025F12DED9}" type="datetimeFigureOut">
               <a:rPr kumimoji="1" lang="ja-JP" altLang="en-US" smtClean="0"/>
-              <a:t>2024/9/30</a:t>
+              <a:t>2025/1/6</a:t>
             </a:fld>
             <a:endParaRPr kumimoji="1" lang="ja-JP" altLang="en-US"/>
           </a:p>
@@ -2190,7 +2190,7 @@
           <a:p>
             <a:fld id="{E9CC885B-4903-4D54-9A93-00025F12DED9}" type="datetimeFigureOut">
               <a:rPr kumimoji="1" lang="ja-JP" altLang="en-US" smtClean="0"/>
-              <a:t>2024/9/30</a:t>
+              <a:t>2025/1/6</a:t>
             </a:fld>
             <a:endParaRPr kumimoji="1" lang="ja-JP" altLang="en-US"/>
           </a:p>
@@ -2303,7 +2303,7 @@
           <a:p>
             <a:fld id="{E9CC885B-4903-4D54-9A93-00025F12DED9}" type="datetimeFigureOut">
               <a:rPr kumimoji="1" lang="ja-JP" altLang="en-US" smtClean="0"/>
-              <a:t>2024/9/30</a:t>
+              <a:t>2025/1/6</a:t>
             </a:fld>
             <a:endParaRPr kumimoji="1" lang="ja-JP" altLang="en-US"/>
           </a:p>
@@ -2646,7 +2646,7 @@
           <a:p>
             <a:fld id="{E9CC885B-4903-4D54-9A93-00025F12DED9}" type="datetimeFigureOut">
               <a:rPr kumimoji="1" lang="ja-JP" altLang="en-US" smtClean="0"/>
-              <a:t>2024/9/30</a:t>
+              <a:t>2025/1/6</a:t>
             </a:fld>
             <a:endParaRPr kumimoji="1" lang="ja-JP" altLang="en-US"/>
           </a:p>
@@ -2934,7 +2934,7 @@
           <a:p>
             <a:fld id="{E9CC885B-4903-4D54-9A93-00025F12DED9}" type="datetimeFigureOut">
               <a:rPr kumimoji="1" lang="ja-JP" altLang="en-US" smtClean="0"/>
-              <a:t>2024/9/30</a:t>
+              <a:t>2025/1/6</a:t>
             </a:fld>
             <a:endParaRPr kumimoji="1" lang="ja-JP" altLang="en-US"/>
           </a:p>
@@ -3207,7 +3207,7 @@
           <a:p>
             <a:fld id="{E9CC885B-4903-4D54-9A93-00025F12DED9}" type="datetimeFigureOut">
               <a:rPr kumimoji="1" lang="ja-JP" altLang="en-US" smtClean="0"/>
-              <a:t>2024/9/30</a:t>
+              <a:t>2025/1/6</a:t>
             </a:fld>
             <a:endParaRPr kumimoji="1" lang="ja-JP" altLang="en-US"/>
           </a:p>
@@ -4598,7 +4598,7 @@
         <p:spPr>
           <a:xfrm>
             <a:off x="567542" y="1216429"/>
-            <a:ext cx="6385081" cy="830997"/>
+            <a:ext cx="6498895" cy="830997"/>
           </a:xfrm>
           <a:prstGeom prst="rect">
             <a:avLst/>
@@ -4612,26 +4612,54 @@
           <a:lstStyle/>
           <a:p>
             <a:r>
-              <a:rPr kumimoji="1" lang="en-US" altLang="ja-JP" sz="2400" dirty="0"/>
+              <a:rPr kumimoji="1" lang="en-US" altLang="ja-JP" sz="2400" b="1" dirty="0">
+                <a:solidFill>
+                  <a:srgbClr val="00B050"/>
+                </a:solidFill>
+              </a:rPr>
               <a:t>Source</a:t>
             </a:r>
             <a:r>
+              <a:rPr kumimoji="1" lang="ja-JP" altLang="en-US" sz="2400" b="1" dirty="0">
+                <a:solidFill>
+                  <a:srgbClr val="00B050"/>
+                </a:solidFill>
+              </a:rPr>
+              <a:t>フォルダ</a:t>
+            </a:r>
+            <a:r>
               <a:rPr kumimoji="1" lang="ja-JP" altLang="en-US" sz="2400" dirty="0"/>
-              <a:t>フォルダに</a:t>
-            </a:r>
-            <a:r>
-              <a:rPr kumimoji="1" lang="en-US" altLang="ja-JP" sz="2400" dirty="0"/>
+              <a:t>に</a:t>
+            </a:r>
+            <a:r>
+              <a:rPr kumimoji="1" lang="en-US" altLang="ja-JP" sz="2400" b="1" dirty="0">
+                <a:solidFill>
+                  <a:srgbClr val="00B050"/>
+                </a:solidFill>
+              </a:rPr>
               <a:t>Sound</a:t>
             </a:r>
             <a:r>
+              <a:rPr kumimoji="1" lang="ja-JP" altLang="en-US" sz="2400" b="1" dirty="0">
+                <a:solidFill>
+                  <a:srgbClr val="00B050"/>
+                </a:solidFill>
+              </a:rPr>
+              <a:t>フォルダ</a:t>
+            </a:r>
+            <a:r>
               <a:rPr kumimoji="1" lang="ja-JP" altLang="en-US" sz="2400" dirty="0"/>
-              <a:t>フォルダを追加し、</a:t>
+              <a:t>を追加し、</a:t>
             </a:r>
             <a:endParaRPr lang="en-US" altLang="ja-JP" sz="2400" dirty="0"/>
           </a:p>
           <a:p>
             <a:r>
-              <a:rPr lang="en-US" altLang="ja-JP" sz="2400" dirty="0"/>
+              <a:rPr lang="en-US" altLang="ja-JP" sz="2400" b="1" dirty="0">
+                <a:solidFill>
+                  <a:srgbClr val="FF0000"/>
+                </a:solidFill>
+              </a:rPr>
               <a:t>SoundManager.cpp/.h</a:t>
             </a:r>
             <a:r>
@@ -4962,10 +4990,10 @@
       </p:sp>
       <p:pic>
         <p:nvPicPr>
-          <p:cNvPr id="3" name="図 2">
-            <a:extLst>
-              <a:ext uri="{FF2B5EF4-FFF2-40B4-BE49-F238E27FC236}">
-                <a16:creationId xmlns:a16="http://schemas.microsoft.com/office/drawing/2014/main" id="{B79F3C90-3097-426A-AC5F-E2D4D82F5787}"/>
+          <p:cNvPr id="5" name="図 4">
+            <a:extLst>
+              <a:ext uri="{FF2B5EF4-FFF2-40B4-BE49-F238E27FC236}">
+                <a16:creationId xmlns:a16="http://schemas.microsoft.com/office/drawing/2014/main" id="{16269B53-F038-400A-ADB8-3B5B976D476C}"/>
               </a:ext>
             </a:extLst>
           </p:cNvPr>
@@ -4975,21 +5003,15 @@
           <p:nvPr/>
         </p:nvPicPr>
         <p:blipFill>
-          <a:blip r:embed="rId2">
-            <a:extLst>
-              <a:ext uri="{28A0092B-C50C-407E-A947-70E740481C1C}">
-                <a14:useLocalDpi xmlns:a14="http://schemas.microsoft.com/office/drawing/2010/main" val="0"/>
-              </a:ext>
-            </a:extLst>
-          </a:blip>
+          <a:blip r:embed="rId2"/>
           <a:stretch>
             <a:fillRect/>
           </a:stretch>
         </p:blipFill>
         <p:spPr>
           <a:xfrm>
-            <a:off x="567542" y="1817795"/>
-            <a:ext cx="9965987" cy="4580078"/>
+            <a:off x="567542" y="1817794"/>
+            <a:ext cx="9096504" cy="4548252"/>
           </a:xfrm>
           <a:prstGeom prst="rect">
             <a:avLst/>
@@ -5674,10 +5696,10 @@
       </p:sp>
       <p:pic>
         <p:nvPicPr>
-          <p:cNvPr id="5" name="図 4">
-            <a:extLst>
-              <a:ext uri="{FF2B5EF4-FFF2-40B4-BE49-F238E27FC236}">
-                <a16:creationId xmlns:a16="http://schemas.microsoft.com/office/drawing/2014/main" id="{2FF67F29-52D1-45DE-8B33-1FAF68E4BE50}"/>
+          <p:cNvPr id="3" name="図 2">
+            <a:extLst>
+              <a:ext uri="{FF2B5EF4-FFF2-40B4-BE49-F238E27FC236}">
+                <a16:creationId xmlns:a16="http://schemas.microsoft.com/office/drawing/2014/main" id="{9AFDBBB3-B5BB-46EF-8348-C27191D19F8E}"/>
               </a:ext>
             </a:extLst>
           </p:cNvPr>
@@ -5687,21 +5709,15 @@
           <p:nvPr/>
         </p:nvPicPr>
         <p:blipFill>
-          <a:blip r:embed="rId2">
-            <a:extLst>
-              <a:ext uri="{28A0092B-C50C-407E-A947-70E740481C1C}">
-                <a14:useLocalDpi xmlns:a14="http://schemas.microsoft.com/office/drawing/2010/main" val="0"/>
-              </a:ext>
-            </a:extLst>
-          </a:blip>
+          <a:blip r:embed="rId2"/>
           <a:stretch>
             <a:fillRect/>
           </a:stretch>
         </p:blipFill>
         <p:spPr>
           <a:xfrm>
-            <a:off x="567542" y="1817795"/>
-            <a:ext cx="8549564" cy="4535398"/>
+            <a:off x="567542" y="1817794"/>
+            <a:ext cx="8229325" cy="4590739"/>
           </a:xfrm>
           <a:prstGeom prst="rect">
             <a:avLst/>

--- a/ゲーム科1年/00_前期/ゲームプログラミングⅡ/03_サウンド.pptx
+++ b/ゲーム科1年/00_前期/ゲームプログラミングⅡ/03_サウンド.pptx
@@ -269,7 +269,7 @@
           <a:p>
             <a:fld id="{E9CC885B-4903-4D54-9A93-00025F12DED9}" type="datetimeFigureOut">
               <a:rPr kumimoji="1" lang="ja-JP" altLang="en-US" smtClean="0"/>
-              <a:t>2025/1/6</a:t>
+              <a:t>2025/3/3</a:t>
             </a:fld>
             <a:endParaRPr kumimoji="1" lang="ja-JP" altLang="en-US"/>
           </a:p>
@@ -499,7 +499,7 @@
           <a:p>
             <a:fld id="{E9CC885B-4903-4D54-9A93-00025F12DED9}" type="datetimeFigureOut">
               <a:rPr kumimoji="1" lang="ja-JP" altLang="en-US" smtClean="0"/>
-              <a:t>2025/1/6</a:t>
+              <a:t>2025/3/3</a:t>
             </a:fld>
             <a:endParaRPr kumimoji="1" lang="ja-JP" altLang="en-US"/>
           </a:p>
@@ -739,7 +739,7 @@
           <a:p>
             <a:fld id="{E9CC885B-4903-4D54-9A93-00025F12DED9}" type="datetimeFigureOut">
               <a:rPr kumimoji="1" lang="ja-JP" altLang="en-US" smtClean="0"/>
-              <a:t>2025/1/6</a:t>
+              <a:t>2025/3/3</a:t>
             </a:fld>
             <a:endParaRPr kumimoji="1" lang="ja-JP" altLang="en-US"/>
           </a:p>
@@ -969,7 +969,7 @@
           <a:p>
             <a:fld id="{E9CC885B-4903-4D54-9A93-00025F12DED9}" type="datetimeFigureOut">
               <a:rPr kumimoji="1" lang="ja-JP" altLang="en-US" smtClean="0"/>
-              <a:t>2025/1/6</a:t>
+              <a:t>2025/3/3</a:t>
             </a:fld>
             <a:endParaRPr kumimoji="1" lang="ja-JP" altLang="en-US"/>
           </a:p>
@@ -1244,7 +1244,7 @@
           <a:p>
             <a:fld id="{E9CC885B-4903-4D54-9A93-00025F12DED9}" type="datetimeFigureOut">
               <a:rPr kumimoji="1" lang="ja-JP" altLang="en-US" smtClean="0"/>
-              <a:t>2025/1/6</a:t>
+              <a:t>2025/3/3</a:t>
             </a:fld>
             <a:endParaRPr kumimoji="1" lang="ja-JP" altLang="en-US"/>
           </a:p>
@@ -1573,7 +1573,7 @@
           <a:p>
             <a:fld id="{E9CC885B-4903-4D54-9A93-00025F12DED9}" type="datetimeFigureOut">
               <a:rPr kumimoji="1" lang="ja-JP" altLang="en-US" smtClean="0"/>
-              <a:t>2025/1/6</a:t>
+              <a:t>2025/3/3</a:t>
             </a:fld>
             <a:endParaRPr kumimoji="1" lang="ja-JP" altLang="en-US"/>
           </a:p>
@@ -2049,7 +2049,7 @@
           <a:p>
             <a:fld id="{E9CC885B-4903-4D54-9A93-00025F12DED9}" type="datetimeFigureOut">
               <a:rPr kumimoji="1" lang="ja-JP" altLang="en-US" smtClean="0"/>
-              <a:t>2025/1/6</a:t>
+              <a:t>2025/3/3</a:t>
             </a:fld>
             <a:endParaRPr kumimoji="1" lang="ja-JP" altLang="en-US"/>
           </a:p>
@@ -2190,7 +2190,7 @@
           <a:p>
             <a:fld id="{E9CC885B-4903-4D54-9A93-00025F12DED9}" type="datetimeFigureOut">
               <a:rPr kumimoji="1" lang="ja-JP" altLang="en-US" smtClean="0"/>
-              <a:t>2025/1/6</a:t>
+              <a:t>2025/3/3</a:t>
             </a:fld>
             <a:endParaRPr kumimoji="1" lang="ja-JP" altLang="en-US"/>
           </a:p>
@@ -2303,7 +2303,7 @@
           <a:p>
             <a:fld id="{E9CC885B-4903-4D54-9A93-00025F12DED9}" type="datetimeFigureOut">
               <a:rPr kumimoji="1" lang="ja-JP" altLang="en-US" smtClean="0"/>
-              <a:t>2025/1/6</a:t>
+              <a:t>2025/3/3</a:t>
             </a:fld>
             <a:endParaRPr kumimoji="1" lang="ja-JP" altLang="en-US"/>
           </a:p>
@@ -2646,7 +2646,7 @@
           <a:p>
             <a:fld id="{E9CC885B-4903-4D54-9A93-00025F12DED9}" type="datetimeFigureOut">
               <a:rPr kumimoji="1" lang="ja-JP" altLang="en-US" smtClean="0"/>
-              <a:t>2025/1/6</a:t>
+              <a:t>2025/3/3</a:t>
             </a:fld>
             <a:endParaRPr kumimoji="1" lang="ja-JP" altLang="en-US"/>
           </a:p>
@@ -2934,7 +2934,7 @@
           <a:p>
             <a:fld id="{E9CC885B-4903-4D54-9A93-00025F12DED9}" type="datetimeFigureOut">
               <a:rPr kumimoji="1" lang="ja-JP" altLang="en-US" smtClean="0"/>
-              <a:t>2025/1/6</a:t>
+              <a:t>2025/3/3</a:t>
             </a:fld>
             <a:endParaRPr kumimoji="1" lang="ja-JP" altLang="en-US"/>
           </a:p>
@@ -3207,7 +3207,7 @@
           <a:p>
             <a:fld id="{E9CC885B-4903-4D54-9A93-00025F12DED9}" type="datetimeFigureOut">
               <a:rPr kumimoji="1" lang="ja-JP" altLang="en-US" smtClean="0"/>
-              <a:t>2025/1/6</a:t>
+              <a:t>2025/3/3</a:t>
             </a:fld>
             <a:endParaRPr kumimoji="1" lang="ja-JP" altLang="en-US"/>
           </a:p>
@@ -4822,7 +4822,7 @@
         <p:spPr>
           <a:xfrm>
             <a:off x="567542" y="1216429"/>
-            <a:ext cx="8140370" cy="461665"/>
+            <a:ext cx="8283037" cy="461665"/>
           </a:xfrm>
           <a:prstGeom prst="rect">
             <a:avLst/>
@@ -4836,7 +4836,11 @@
           <a:lstStyle/>
           <a:p>
             <a:r>
-              <a:rPr kumimoji="1" lang="en-US" altLang="ja-JP" sz="2400" dirty="0" err="1"/>
+              <a:rPr kumimoji="1" lang="en-US" altLang="ja-JP" sz="2400" b="1" dirty="0" err="1">
+                <a:solidFill>
+                  <a:srgbClr val="FF0000"/>
+                </a:solidFill>
+              </a:rPr>
               <a:t>SoundManager.h</a:t>
             </a:r>
             <a:r>
@@ -4963,7 +4967,7 @@
         <p:spPr>
           <a:xfrm>
             <a:off x="567542" y="1216429"/>
-            <a:ext cx="3860352" cy="461665"/>
+            <a:ext cx="4023858" cy="461665"/>
           </a:xfrm>
           <a:prstGeom prst="rect">
             <a:avLst/>
@@ -4977,7 +4981,11 @@
           <a:lstStyle/>
           <a:p>
             <a:r>
-              <a:rPr kumimoji="1" lang="en-US" altLang="ja-JP" sz="2400" dirty="0"/>
+              <a:rPr kumimoji="1" lang="en-US" altLang="ja-JP" sz="2400" b="1" dirty="0">
+                <a:solidFill>
+                  <a:srgbClr val="FF0000"/>
+                </a:solidFill>
+              </a:rPr>
               <a:t>SoundManager.cpp</a:t>
             </a:r>
             <a:r>
@@ -5098,7 +5106,7 @@
         <p:spPr>
           <a:xfrm>
             <a:off x="567542" y="1216429"/>
-            <a:ext cx="3860352" cy="461665"/>
+            <a:ext cx="4023858" cy="461665"/>
           </a:xfrm>
           <a:prstGeom prst="rect">
             <a:avLst/>
@@ -5112,7 +5120,11 @@
           <a:lstStyle/>
           <a:p>
             <a:r>
-              <a:rPr kumimoji="1" lang="en-US" altLang="ja-JP" sz="2400" dirty="0"/>
+              <a:rPr kumimoji="1" lang="en-US" altLang="ja-JP" sz="2400" b="1" dirty="0">
+                <a:solidFill>
+                  <a:srgbClr val="FF0000"/>
+                </a:solidFill>
+              </a:rPr>
               <a:t>SoundManager.cpp</a:t>
             </a:r>
             <a:r>
@@ -5516,7 +5528,7 @@
         <p:spPr>
           <a:xfrm>
             <a:off x="567542" y="1216429"/>
-            <a:ext cx="9448420" cy="461665"/>
+            <a:ext cx="9591087" cy="461665"/>
           </a:xfrm>
           <a:prstGeom prst="rect">
             <a:avLst/>
@@ -5542,7 +5554,11 @@
               <a:t>側も実装します。</a:t>
             </a:r>
             <a:r>
-              <a:rPr lang="en-US" altLang="ja-JP" sz="2400" dirty="0" err="1"/>
+              <a:rPr lang="en-US" altLang="ja-JP" sz="2400" b="1" dirty="0" err="1">
+                <a:solidFill>
+                  <a:srgbClr val="FF0000"/>
+                </a:solidFill>
+              </a:rPr>
               <a:t>SoundManager.h</a:t>
             </a:r>
             <a:r>
@@ -5669,7 +5685,7 @@
         <p:spPr>
           <a:xfrm>
             <a:off x="567542" y="1216429"/>
-            <a:ext cx="3244799" cy="461665"/>
+            <a:ext cx="3408305" cy="461665"/>
           </a:xfrm>
           <a:prstGeom prst="rect">
             <a:avLst/>
@@ -5683,7 +5699,11 @@
           <a:lstStyle/>
           <a:p>
             <a:r>
-              <a:rPr lang="en-US" altLang="ja-JP" sz="2400" dirty="0"/>
+              <a:rPr lang="en-US" altLang="ja-JP" sz="2400" b="1" dirty="0">
+                <a:solidFill>
+                  <a:srgbClr val="FF0000"/>
+                </a:solidFill>
+              </a:rPr>
               <a:t>SoundManager.cpp</a:t>
             </a:r>
             <a:r>
